--- a/slides/05_Reconvene_and_Wrap-Up.pptx
+++ b/slides/05_Reconvene_and_Wrap-Up.pptx
@@ -1187,7 +1187,7 @@
     </p:spTree>
     <p:extLst>
       <p:ext uri="{BB962C8B-B14F-4D97-AF65-F5344CB8AC3E}">
-        <p14:creationId xmlns:p14="http://schemas.microsoft.com/office/powerpoint/2010/main" val="2288466981"/>
+        <p14:creationId xmlns:p14="http://schemas.microsoft.com/office/powerpoint/2010/main" val="4261992453"/>
       </p:ext>
     </p:extLst>
   </p:cSld>
@@ -11590,13 +11590,7 @@
       </p:pic>
       <p:pic>
         <p:nvPicPr>
-          <p:cNvPr id="5" name="Website">
-            <a:extLst>
-              <a:ext uri="{C183D7F6-B498-43B3-948B-1728B52AA6E4}">
-                <adec:decorative xmlns:adec="http://schemas.microsoft.com/office/drawing/2017/decorative" val="1"/>
-              </a:ext>
-            </a:extLst>
-          </p:cNvPr>
+          <p:cNvPr id="5" name="Website" descr="Website:"/>
           <p:cNvPicPr>
             <a:picLocks noChangeAspect="1"/>
           </p:cNvPicPr>
@@ -11658,13 +11652,7 @@
       </p:sp>
       <p:pic>
         <p:nvPicPr>
-          <p:cNvPr id="7" name="Email">
-            <a:extLst>
-              <a:ext uri="{C183D7F6-B498-43B3-948B-1728B52AA6E4}">
-                <adec:decorative xmlns:adec="http://schemas.microsoft.com/office/drawing/2017/decorative" val="1"/>
-              </a:ext>
-            </a:extLst>
-          </p:cNvPr>
+          <p:cNvPr id="7" name="Email" descr="Email:"/>
           <p:cNvPicPr>
             <a:picLocks noChangeAspect="1"/>
           </p:cNvPicPr>
@@ -11726,13 +11714,7 @@
       </p:sp>
       <p:pic>
         <p:nvPicPr>
-          <p:cNvPr id="9" name="Instagram">
-            <a:extLst>
-              <a:ext uri="{C183D7F6-B498-43B3-948B-1728B52AA6E4}">
-                <adec:decorative xmlns:adec="http://schemas.microsoft.com/office/drawing/2017/decorative" val="1"/>
-              </a:ext>
-            </a:extLst>
-          </p:cNvPr>
+          <p:cNvPr id="9" name="Instagram" descr="Instagram:"/>
           <p:cNvPicPr>
             <a:picLocks noChangeAspect="1"/>
           </p:cNvPicPr>
@@ -11794,13 +11776,7 @@
       </p:sp>
       <p:pic>
         <p:nvPicPr>
-          <p:cNvPr id="11" name="Threads">
-            <a:extLst>
-              <a:ext uri="{C183D7F6-B498-43B3-948B-1728B52AA6E4}">
-                <adec:decorative xmlns:adec="http://schemas.microsoft.com/office/drawing/2017/decorative" val="1"/>
-              </a:ext>
-            </a:extLst>
-          </p:cNvPr>
+          <p:cNvPr id="11" name="Threads" descr="Threads:"/>
           <p:cNvPicPr>
             <a:picLocks noChangeAspect="1"/>
           </p:cNvPicPr>
@@ -11862,13 +11838,7 @@
       </p:sp>
       <p:pic>
         <p:nvPicPr>
-          <p:cNvPr id="13" name="LinkedIn">
-            <a:extLst>
-              <a:ext uri="{C183D7F6-B498-43B3-948B-1728B52AA6E4}">
-                <adec:decorative xmlns:adec="http://schemas.microsoft.com/office/drawing/2017/decorative" val="1"/>
-              </a:ext>
-            </a:extLst>
-          </p:cNvPr>
+          <p:cNvPr id="13" name="LinkedIn" descr="LinkedIn:"/>
           <p:cNvPicPr>
             <a:picLocks noChangeAspect="1"/>
           </p:cNvPicPr>
